--- a/DataStory_DDDM_Ecommerce.pptx
+++ b/DataStory_DDDM_Ecommerce.pptx
@@ -1904,6 +1904,17 @@
               <a:buNone/>
             </a:pPr>
             <a:r>
+              <a:rPr lang="en-US" sz="1000" smtClean="0">
+                <a:solidFill>
+                  <a:srgbClr val="8892B0"/>
+                </a:solidFill>
+                <a:latin typeface="Calibri" pitchFamily="34" charset="0"/>
+                <a:ea typeface="Calibri" pitchFamily="34" charset="-122"/>
+                <a:cs typeface="Calibri" pitchFamily="34" charset="-120"/>
+              </a:rPr>
+              <a:t>SALMA ZAKOUR|  </a:t>
+            </a:r>
+            <a:r>
               <a:rPr lang="en-US" sz="1000" dirty="0">
                 <a:solidFill>
                   <a:srgbClr val="8892B0"/>
@@ -1912,7 +1923,7 @@
                 <a:ea typeface="Calibri" pitchFamily="34" charset="-122"/>
                 <a:cs typeface="Calibri" pitchFamily="34" charset="-120"/>
               </a:rPr>
-              <a:t>Module DDDM  |  Analyse E-Commerce  |  </a:t>
+              <a:t>Analyse E-Commerce  |  </a:t>
             </a:r>
             <a:r>
               <a:rPr lang="en-US" sz="1000" dirty="0" smtClean="0">
@@ -4914,7 +4925,18 @@
                 <a:ea typeface="Calibri" pitchFamily="34" charset="-122"/>
                 <a:cs typeface="Calibri" pitchFamily="34" charset="-120"/>
               </a:rPr>
-              <a:t>Sources, qualite, enrichissement</a:t>
+              <a:t>Sources, </a:t>
+            </a:r>
+            <a:r>
+              <a:rPr lang="en-US" sz="1000" dirty="0" err="1" smtClean="0">
+                <a:solidFill>
+                  <a:srgbClr val="8892B0"/>
+                </a:solidFill>
+                <a:latin typeface="Calibri" pitchFamily="34" charset="0"/>
+                <a:ea typeface="Calibri" pitchFamily="34" charset="-122"/>
+                <a:cs typeface="Calibri" pitchFamily="34" charset="-120"/>
+              </a:rPr>
+              <a:t>qualite</a:t>
             </a:r>
             <a:endParaRPr lang="en-US" sz="1000" dirty="0"/>
           </a:p>
@@ -5262,7 +5284,40 @@
                 <a:ea typeface="Calibri" pitchFamily="34" charset="-122"/>
                 <a:cs typeface="Calibri" pitchFamily="34" charset="-120"/>
               </a:rPr>
-              <a:t>Clustering BCG, 3 modeles ML, SHAP</a:t>
+              <a:t>Clustering BCG, 3 </a:t>
+            </a:r>
+            <a:r>
+              <a:rPr lang="en-US" sz="1000" dirty="0" err="1">
+                <a:solidFill>
+                  <a:srgbClr val="8892B0"/>
+                </a:solidFill>
+                <a:latin typeface="Calibri" pitchFamily="34" charset="0"/>
+                <a:ea typeface="Calibri" pitchFamily="34" charset="-122"/>
+                <a:cs typeface="Calibri" pitchFamily="34" charset="-120"/>
+              </a:rPr>
+              <a:t>modeles</a:t>
+            </a:r>
+            <a:r>
+              <a:rPr lang="en-US" sz="1000" dirty="0">
+                <a:solidFill>
+                  <a:srgbClr val="8892B0"/>
+                </a:solidFill>
+                <a:latin typeface="Calibri" pitchFamily="34" charset="0"/>
+                <a:ea typeface="Calibri" pitchFamily="34" charset="-122"/>
+                <a:cs typeface="Calibri" pitchFamily="34" charset="-120"/>
+              </a:rPr>
+              <a:t> </a:t>
+            </a:r>
+            <a:r>
+              <a:rPr lang="en-US" sz="1000" dirty="0" smtClean="0">
+                <a:solidFill>
+                  <a:srgbClr val="8892B0"/>
+                </a:solidFill>
+                <a:latin typeface="Calibri" pitchFamily="34" charset="0"/>
+                <a:ea typeface="Calibri" pitchFamily="34" charset="-122"/>
+                <a:cs typeface="Calibri" pitchFamily="34" charset="-120"/>
+              </a:rPr>
+              <a:t>ML</a:t>
             </a:r>
             <a:endParaRPr lang="en-US" sz="1000" dirty="0"/>
           </a:p>
@@ -5436,7 +5491,18 @@
                 <a:ea typeface="Calibri" pitchFamily="34" charset="-122"/>
                 <a:cs typeface="Calibri" pitchFamily="34" charset="-120"/>
               </a:rPr>
-              <a:t>Recommandations, score composite, ROI</a:t>
+              <a:t>Recommandations, score </a:t>
+            </a:r>
+            <a:r>
+              <a:rPr lang="en-US" sz="1000" dirty="0" smtClean="0">
+                <a:solidFill>
+                  <a:srgbClr val="8892B0"/>
+                </a:solidFill>
+                <a:latin typeface="Calibri" pitchFamily="34" charset="0"/>
+                <a:ea typeface="Calibri" pitchFamily="34" charset="-122"/>
+                <a:cs typeface="Calibri" pitchFamily="34" charset="-120"/>
+              </a:rPr>
+              <a:t>composite</a:t>
             </a:r>
             <a:endParaRPr lang="en-US" sz="1000" dirty="0"/>
           </a:p>
@@ -9038,6 +9104,13 @@
   <p:clrMapOvr>
     <a:masterClrMapping/>
   </p:clrMapOvr>
+  <p:timing>
+    <p:tnLst>
+      <p:par>
+        <p:cTn id="1" dur="indefinite" restart="never" nodeType="tmRoot"/>
+      </p:par>
+    </p:tnLst>
+  </p:timing>
 </p:sld>
 </file>
 
@@ -9154,22 +9227,21 @@
       </p:sp>
       <p:pic>
         <p:nvPicPr>
-          <p:cNvPr id="62" name="Picture 61"/>
+          <p:cNvPr id="4" name="Picture 3"/>
           <p:cNvPicPr>
             <a:picLocks noChangeAspect="1"/>
           </p:cNvPicPr>
           <p:nvPr/>
         </p:nvPicPr>
-        <p:blipFill>
+        <p:blipFill rotWithShape="1">
           <a:blip r:embed="rId3"/>
-          <a:stretch>
-            <a:fillRect/>
-          </a:stretch>
+          <a:srcRect t="26650"/>
+          <a:stretch/>
         </p:blipFill>
         <p:spPr>
           <a:xfrm>
-            <a:off x="14987" y="1292136"/>
-            <a:ext cx="9129013" cy="2653332"/>
+            <a:off x="310680" y="1339703"/>
+            <a:ext cx="8330400" cy="3420999"/>
           </a:xfrm>
           <a:prstGeom prst="rect">
             <a:avLst/>
@@ -9181,6 +9253,13 @@
   <p:clrMapOvr>
     <a:masterClrMapping/>
   </p:clrMapOvr>
+  <p:timing>
+    <p:tnLst>
+      <p:par>
+        <p:cTn id="1" dur="indefinite" restart="never" nodeType="tmRoot"/>
+      </p:par>
+    </p:tnLst>
+  </p:timing>
 </p:sld>
 </file>
 
